--- a/docs/นำเสนอโครงการ1_HabitTracker.pptx
+++ b/docs/นำเสนอโครงการ1_HabitTracker.pptx
@@ -3973,13 +3973,13 @@
               </a:spcAft>
             </a:pPr>
             <a:r>
-              <a:rPr sz="1200" b="0">
+              <a:rPr sz="1150" b="0">
                 <a:solidFill>
                   <a:srgbClr val="5A6B7B"/>
                 </a:solidFill>
                 <a:latin typeface="Leelawadee UI"/>
               </a:rPr>
-              <a:t>ความก้าวหน้าปัจจุบัน : 75%</a:t>
+              <a:t>ความก้าวหน้าปัจจุบัน : 80%</a:t>
             </a:r>
           </a:p>
           <a:p>
@@ -3992,7 +3992,7 @@
               </a:spcAft>
             </a:pPr>
             <a:r>
-              <a:rPr sz="1200" b="0">
+              <a:rPr sz="1150" b="0">
                 <a:solidFill>
                   <a:srgbClr val="5A6B7B"/>
                 </a:solidFill>
@@ -4011,7 +4011,7 @@
               </a:spcAft>
             </a:pPr>
             <a:r>
-              <a:rPr sz="1200" b="0">
+              <a:rPr sz="1150" b="0">
                 <a:solidFill>
                   <a:srgbClr val="5A6B7B"/>
                 </a:solidFill>
@@ -4030,13 +4030,13 @@
               </a:spcAft>
             </a:pPr>
             <a:r>
-              <a:rPr sz="1200" b="0">
+              <a:rPr sz="1150" b="0">
                 <a:solidFill>
                   <a:srgbClr val="5A6B7B"/>
                 </a:solidFill>
                 <a:latin typeface="Leelawadee UI"/>
               </a:rPr>
-              <a:t>1) บันทึกพฤติกรรมประจำวันลงฐานข้อมูลในเครื่องได้จริง ทั้งแบบทำ/ไม่ทำ และแบบมีเป้าตัวเลข</a:t>
+              <a:t>1) บันทึกพฤติกรรมประจำวันลงฐานข้อมูลในเครื่องได้จริง ทั้งแบบทำ/ไม่ทำ แบบมีเป้าตัวเลข และแบบ N ครั้งต่อสัปดาห์</a:t>
             </a:r>
           </a:p>
           <a:p>
@@ -4049,7 +4049,7 @@
               </a:spcAft>
             </a:pPr>
             <a:r>
-              <a:rPr sz="1200" b="0">
+              <a:rPr sz="1150" b="0">
                 <a:solidFill>
                   <a:srgbClr val="5A6B7B"/>
                 </a:solidFill>
@@ -4068,7 +4068,7 @@
               </a:spcAft>
             </a:pPr>
             <a:r>
-              <a:rPr sz="1200" b="0">
+              <a:rPr sz="1150" b="0">
                 <a:solidFill>
                   <a:srgbClr val="5A6B7B"/>
                 </a:solidFill>
@@ -4240,7 +4240,7 @@
               </a:spcAft>
             </a:pPr>
             <a:r>
-              <a:rPr sz="1200" b="0">
+              <a:rPr sz="1050" b="0">
                 <a:solidFill>
                   <a:srgbClr val="5A6B7B"/>
                 </a:solidFill>
@@ -4259,7 +4259,7 @@
               </a:spcAft>
             </a:pPr>
             <a:r>
-              <a:rPr sz="1200" b="0">
+              <a:rPr sz="1050" b="0">
                 <a:solidFill>
                   <a:srgbClr val="5A6B7B"/>
                 </a:solidFill>
@@ -4278,13 +4278,13 @@
               </a:spcAft>
             </a:pPr>
             <a:r>
-              <a:rPr sz="1200" b="0">
+              <a:rPr sz="1050" b="0">
                 <a:solidFill>
                   <a:srgbClr val="5A6B7B"/>
                 </a:solidFill>
                 <a:latin typeface="Leelawadee UI"/>
               </a:rPr>
-              <a:t>• ซอร์สโค้ด 26 ไฟล์ Dart ประมาณ 3,000 บรรทัด อยู่บน Git</a:t>
+              <a:t>• ซอร์สโค้ด 29 ไฟล์ Dart ประมาณ 3,200 บรรทัด อยู่บน Git</a:t>
             </a:r>
           </a:p>
           <a:p>
@@ -4297,12 +4297,31 @@
               </a:spcAft>
             </a:pPr>
             <a:r>
-              <a:rPr sz="1200" b="0">
+              <a:rPr sz="1050" b="0">
                 <a:solidFill>
                   <a:srgbClr val="5A6B7B"/>
                 </a:solidFill>
                 <a:latin typeface="Leelawadee UI"/>
               </a:rPr>
+              <a:t>• ชุดทดสอบอัตโนมัติ 8 กรณี รันผ่านทั้งหมด</a:t>
+            </a:r>
+          </a:p>
+          <a:p>
+            <a:pPr algn="l">
+              <a:lnSpc>
+                <a:spcPct val="115000"/>
+              </a:lnSpc>
+              <a:spcAft>
+                <a:spcPts val="600"/>
+              </a:spcAft>
+            </a:pPr>
+            <a:r>
+              <a:rPr sz="1050" b="0">
+                <a:solidFill>
+                  <a:srgbClr val="5A6B7B"/>
+                </a:solidFill>
+                <a:latin typeface="Leelawadee UI"/>
+              </a:rPr>
               <a:t>• คู่มือติดตั้ง SETUP.md ที่ผู้อื่นทำตามแล้วรันได้</a:t>
             </a:r>
           </a:p>
@@ -4316,7 +4335,7 @@
               </a:spcAft>
             </a:pPr>
             <a:r>
-              <a:rPr sz="1200" b="0">
+              <a:rPr sz="1050" b="0">
                 <a:solidFill>
                   <a:srgbClr val="5A6B7B"/>
                 </a:solidFill>
@@ -4335,7 +4354,7 @@
               </a:spcAft>
             </a:pPr>
             <a:r>
-              <a:rPr sz="1200" b="0">
+              <a:rPr sz="1050" b="0">
                 <a:solidFill>
                   <a:srgbClr val="5A6B7B"/>
                 </a:solidFill>
@@ -4513,7 +4532,7 @@
                 </a:solidFill>
                 <a:latin typeface="Leelawadee UI"/>
               </a:rPr>
-              <a:t>• ทำระบบแจ้งเตือนและความถี่ N ครั้งต่อสัปดาห์ให้ครบ</a:t>
+              <a:t>• ทำระบบแจ้งเตือนตามเวลาให้ใช้งานได้จริง</a:t>
             </a:r>
           </a:p>
           <a:p>
@@ -4551,7 +4570,7 @@
                 </a:solidFill>
                 <a:latin typeface="Leelawadee UI"/>
               </a:rPr>
-              <a:t>• เขียนชุดทดสอบอัตโนมัติและรันผ่านทั้งหมด</a:t>
+              <a:t>• ขยายชุดทดสอบอัตโนมัติให้ครอบคลุมทุกส่วน</a:t>
             </a:r>
           </a:p>
           <a:p>
@@ -7008,7 +7027,7 @@
         <p:spPr>
           <a:xfrm>
             <a:off x="502920" y="1737360"/>
-            <a:ext cx="8385048" cy="502920"/>
+            <a:ext cx="8942832" cy="502920"/>
           </a:xfrm>
           <a:prstGeom prst="rect">
             <a:avLst/>
@@ -7049,7 +7068,7 @@
         </p:nvSpPr>
         <p:spPr>
           <a:xfrm>
-            <a:off x="9144000" y="1801368"/>
+            <a:off x="9692640" y="1801368"/>
             <a:ext cx="1828800" cy="365760"/>
           </a:xfrm>
           <a:prstGeom prst="rect">
@@ -7078,7 +7097,7 @@
                 </a:solidFill>
                 <a:latin typeface="Leelawadee UI"/>
               </a:rPr>
-              <a:t>75%</a:t>
+              <a:t>80%</a:t>
             </a:r>
           </a:p>
         </p:txBody>
@@ -7713,11 +7732,11 @@
                       <a:r>
                         <a:rPr sz="1050" b="1">
                           <a:solidFill>
-                            <a:srgbClr val="C9821A"/>
+                            <a:srgbClr val="1E884B"/>
                           </a:solidFill>
                           <a:latin typeface="Leelawadee UI"/>
                         </a:rPr>
-                        <a:t>กำลังดำเนินการ</a:t>
+                        <a:t>เสร็จแล้ว</a:t>
                       </a:r>
                     </a:p>
                   </a:txBody>
@@ -7744,7 +7763,7 @@
                           </a:solidFill>
                           <a:latin typeface="Leelawadee UI"/>
                         </a:rPr>
-                        <a:t>มีตัวเลือกในหน้าเพิ่ม habit แล้ว แต่ยังนับผลเหมือนรายวัน</a:t>
+                        <a:t>เลือก 1–7 ครั้ง นับผลเป็นรายสัปดาห์ / ทดสอบอัตโนมัติผ่าน</a:t>
                       </a:r>
                     </a:p>
                   </a:txBody>
@@ -7796,11 +7815,11 @@
                       <a:r>
                         <a:rPr sz="1050" b="1">
                           <a:solidFill>
-                            <a:srgbClr val="C0392B"/>
+                            <a:srgbClr val="C9821A"/>
                           </a:solidFill>
                           <a:latin typeface="Leelawadee UI"/>
                         </a:rPr>
-                        <a:t>ยังไม่เสร็จ</a:t>
+                        <a:t>กำลังดำเนินการ</a:t>
                       </a:r>
                     </a:p>
                   </a:txBody>
@@ -7827,7 +7846,7 @@
                           </a:solidFill>
                           <a:latin typeface="Leelawadee UI"/>
                         </a:rPr>
-                        <a:t>test/widget_test.dart ยังเป็นไฟล์ตัวอย่างที่ Flutter สร้างให้</a:t>
+                        <a:t>weekly_frequency_test.dart ผ่าน 8/8 กรณี · ส่วนอื่นยังไม่มี</a:t>
                       </a:r>
                     </a:p>
                   </a:txBody>
@@ -7967,7 +7986,7 @@
                 </a:solidFill>
                 <a:latin typeface="Leelawadee UI"/>
               </a:rPr>
-              <a:t>75% : 5 โมดูลหลักเสร็จและสาธิตได้ · 2 รายการทำไปบางส่วน · ชุดทดสอบอัตโนมัติยังไม่เริ่ม</a:t>
+              <a:t>80% : 6 โมดูลหลักเสร็จและสาธิตได้ · ระบบแจ้งเตือนทำไปบางส่วน · ชุดทดสอบอัตโนมัติเริ่มแล้ว 8 กรณี</a:t>
             </a:r>
           </a:p>
         </p:txBody>
@@ -12643,7 +12662,7 @@
               </a:spcAft>
             </a:pPr>
             <a:r>
-              <a:rPr sz="1150" b="0">
+              <a:rPr sz="850" b="0">
                 <a:solidFill>
                   <a:srgbClr val="5A6B7B"/>
                 </a:solidFill>
@@ -12662,13 +12681,32 @@
               </a:spcAft>
             </a:pPr>
             <a:r>
-              <a:rPr sz="1150" b="0">
+              <a:rPr sz="850" b="0">
                 <a:solidFill>
                   <a:srgbClr val="5A6B7B"/>
                 </a:solidFill>
                 <a:latin typeface="Leelawadee UI"/>
               </a:rPr>
-              <a:t>• ต้องปรับปรุงก่อนสอบจบ : ระบบแจ้งเตือน ความถี่ N ครั้งต่อสัปดาห์ และชุดทดสอบอัตโนมัติ</a:t>
+              <a:t>• ความถี่ N ครั้งต่อสัปดาห์ : สั่ง flutter test แล้วผ่าน 8/8 กรณี</a:t>
+            </a:r>
+          </a:p>
+          <a:p>
+            <a:pPr algn="l">
+              <a:lnSpc>
+                <a:spcPct val="115000"/>
+              </a:lnSpc>
+              <a:spcAft>
+                <a:spcPts val="600"/>
+              </a:spcAft>
+            </a:pPr>
+            <a:r>
+              <a:rPr sz="850" b="0">
+                <a:solidFill>
+                  <a:srgbClr val="5A6B7B"/>
+                </a:solidFill>
+                <a:latin typeface="Leelawadee UI"/>
+              </a:rPr>
+              <a:t>• ต้องปรับปรุงก่อนสอบจบ : ระบบแจ้งเตือน และขยายชุดทดสอบอัตโนมัติให้ครอบคลุม</a:t>
             </a:r>
           </a:p>
         </p:txBody>
@@ -14402,11 +14440,11 @@
                       <a:r>
                         <a:rPr sz="1050" b="1">
                           <a:solidFill>
-                            <a:srgbClr val="C9821A"/>
+                            <a:srgbClr val="1E884B"/>
                           </a:solidFill>
                           <a:latin typeface="Leelawadee UI"/>
                         </a:rPr>
-                        <a:t>40%</a:t>
+                        <a:t>เสร็จแล้ว</a:t>
                       </a:r>
                     </a:p>
                   </a:txBody>
@@ -14433,7 +14471,7 @@
                           </a:solidFill>
                           <a:latin typeface="Leelawadee UI"/>
                         </a:rPr>
-                        <a:t>แก้ตัวคำนวณให้นับจำนวนครั้งที่ทำได้ในสัปดาห์เทียบกับเป้าหมาย แทนการนับรายวัน ทั้งหน้าหลักและหน้าสถิติ</a:t>
+                        <a:t>เพิ่มตัวเลือก 1–7 ครั้ง · นับครั้งที่ทำในสัปดาห์เทียบเป้า · Streak นับเป็นสัปดาห์ ทั้งหน้าหลักและหน้าสถิติ</a:t>
                       </a:r>
                     </a:p>
                   </a:txBody>
@@ -14460,7 +14498,7 @@
                           </a:solidFill>
                           <a:latin typeface="Leelawadee UI"/>
                         </a:rPr>
-                        <a:t>ผลทดสอบ : ตั้งเป้า 3 ครั้ง/สัปดาห์ ทำได้ 2 ครั้ง ต้องแสดง 2/3</a:t>
+                        <a:t>ผลทดสอบ : ตั้งเป้า 3 ครั้ง/สัปดาห์ ทำได้ 2 ครั้ง แสดง 2/3 — ผ่านแล้ว</a:t>
                       </a:r>
                     </a:p>
                   </a:txBody>
@@ -14622,11 +14660,11 @@
                       <a:r>
                         <a:rPr sz="1050" b="1">
                           <a:solidFill>
-                            <a:srgbClr val="C0392B"/>
+                            <a:srgbClr val="C9821A"/>
                           </a:solidFill>
                           <a:latin typeface="Leelawadee UI"/>
                         </a:rPr>
-                        <a:t>ยังไม่เริ่ม</a:t>
+                        <a:t>เริ่มแล้ว</a:t>
                       </a:r>
                     </a:p>
                   </a:txBody>
@@ -14653,7 +14691,7 @@
                           </a:solidFill>
                           <a:latin typeface="Leelawadee UI"/>
                         </a:rPr>
-                        <a:t>เขียนชุดทดสอบตัวคำนวณ Streak (ทำต่อเนื่อง / ขาดกลางทาง / เจาะจงวัน) และทดสอบหน้าหลัก แทนไฟล์ตัวอย่างเดิม</a:t>
+                        <a:t>มีชุดทดสอบความถี่รายสัปดาห์ 8 กรณีแล้ว · ต่อไปเขียนทดสอบ Streak แบบเจาะจงวัน และหน้าหลัก แทนไฟล์ตัวอย่างเดิม</a:t>
                       </a:r>
                     </a:p>
                   </a:txBody>
